--- a/data-eng/decks/w2d1s0.pptx
+++ b/data-eng/decks/w2d1s0.pptx
@@ -4571,7 +4571,7 @@
                 <a:ea typeface="Pretendard"/>
                 <a:cs typeface="Pretendard"/>
               </a:rPr>
-              <a:t>같은 명령을 쳐도 결과가 갈리는 세 곳</a:t>
+              <a:t>수업 전에 맞춰 둘 네 가지</a:t>
             </a:r>
           </a:p>
         </p:txBody>
@@ -6552,7 +6552,7 @@
                 <a:ea typeface="Pretendard"/>
                 <a:cs typeface="Pretendard"/>
               </a:rPr>
-              <a:t>docker version 이 숫자를 낸다</a:t>
+              <a:t>--format 으로 Server 버전 한 줄</a:t>
             </a:r>
           </a:p>
         </p:txBody>
@@ -8313,7 +8313,7 @@
                 <a:ea typeface="Pretendard"/>
                 <a:cs typeface="Pretendard"/>
               </a:rPr>
-              <a:t>brew services stop</a:t>
+              <a:t>brew stop · 설정 앱 Stop</a:t>
             </a:r>
           </a:p>
         </p:txBody>
@@ -8747,7 +8747,7 @@
                 <a:ea typeface="Pretendard"/>
                 <a:cs typeface="Pretendard"/>
               </a:rPr>
-              <a:t>Windows 는 모든 명령을 우분투(WSL) 터미널에서 — 2단계 포트 확인 한 줄만 PowerShell</a:t>
+              <a:t>2단계는 공통 docker ps 먼저, 그다음 운영체제별 한 줄 — Windows 만 그 한 줄을 PowerShell 에서</a:t>
             </a:r>
           </a:p>
         </p:txBody>
@@ -12306,7 +12306,7 @@
                 <a:ea typeface="Pretendard"/>
                 <a:cs typeface="Pretendard"/>
               </a:rPr>
-              <a:t>docker version 이 29.6.1 처럼 버전 한 줄을 낸다</a:t>
+              <a:t>docker version --format … 이 29.6.1 처럼 한 줄을 낸다</a:t>
             </a:r>
           </a:p>
         </p:txBody>

--- a/data-eng/decks/w2d1s0.pptx
+++ b/data-eng/decks/w2d1s0.pptx
@@ -10626,7 +10626,7 @@
                 <a:ea typeface="Pretendard"/>
                 <a:cs typeface="Pretendard"/>
               </a:rPr>
-              <a:t>docker exec -it -e LANG=C.UTF-8 de-mysql mysql …</a:t>
+              <a:t>4단계는 아직 치지 않는다 — 순서만 확인</a:t>
             </a:r>
           </a:p>
         </p:txBody>
@@ -10667,7 +10667,7 @@
                 <a:ea typeface="Pretendard"/>
                 <a:cs typeface="Pretendard"/>
               </a:rPr>
-              <a:t>빼면 mysql&gt; 에 친 한글이 사라지고 기존 한글은 ??? 로 보인다</a:t>
+              <a:t>docker run(기동 1단계) → logs 에 port: 3306 → exec -e LANG=C.UTF-8</a:t>
             </a:r>
           </a:p>
         </p:txBody>
@@ -10742,7 +10742,7 @@
                 <a:ea typeface="Pretendard"/>
                 <a:cs typeface="Pretendard"/>
               </a:rPr>
-              <a:t>접속은</a:t>
+              <a:t>지금 exec 를 치면</a:t>
             </a:r>
           </a:p>
         </p:txBody>
@@ -10783,7 +10783,7 @@
                 <a:ea typeface="Pretendard"/>
                 <a:cs typeface="Pretendard"/>
               </a:rPr>
-              <a:t>기동과 접속</a:t>
+              <a:t>No such</a:t>
             </a:r>
           </a:p>
           <a:p>
@@ -10801,7 +10801,7 @@
                 <a:ea typeface="Pretendard"/>
                 <a:cs typeface="Pretendard"/>
               </a:rPr>
-              <a:t>3단계에서</a:t>
+              <a:t>container</a:t>
             </a:r>
           </a:p>
         </p:txBody>

--- a/data-eng/decks/w2d1s0.pptx
+++ b/data-eng/decks/w2d1s0.pptx
@@ -3099,7 +3099,7 @@
       <p:grpSpPr/>
       <p:sp>
         <p:nvSpPr>
-          <p:cNvPr id="2" name="Oval 1"/>
+          <p:cNvPr id="2" name="deckgen:decor"/>
           <p:cNvSpPr/>
           <p:nvPr/>
         </p:nvSpPr>
@@ -3129,7 +3129,7 @@
       </p:sp>
       <p:sp>
         <p:nvSpPr>
-          <p:cNvPr id="3" name="Oval 2"/>
+          <p:cNvPr id="3" name="deckgen:decor"/>
           <p:cNvSpPr/>
           <p:nvPr/>
         </p:nvSpPr>
@@ -3159,7 +3159,7 @@
       </p:sp>
       <p:sp>
         <p:nvSpPr>
-          <p:cNvPr id="4" name="Oval 3"/>
+          <p:cNvPr id="4" name="deckgen:decor"/>
           <p:cNvSpPr/>
           <p:nvPr/>
         </p:nvSpPr>
@@ -3189,7 +3189,7 @@
       </p:sp>
       <p:sp>
         <p:nvSpPr>
-          <p:cNvPr id="5" name="Rectangle 4"/>
+          <p:cNvPr id="5" name="deckgen:decor"/>
           <p:cNvSpPr/>
           <p:nvPr/>
         </p:nvSpPr>
@@ -3219,7 +3219,7 @@
       </p:sp>
       <p:sp>
         <p:nvSpPr>
-          <p:cNvPr id="6" name="Oval 5"/>
+          <p:cNvPr id="6" name="deckgen:decor"/>
           <p:cNvSpPr/>
           <p:nvPr/>
         </p:nvSpPr>
@@ -3249,7 +3249,7 @@
       </p:sp>
       <p:sp>
         <p:nvSpPr>
-          <p:cNvPr id="7" name="Oval 6"/>
+          <p:cNvPr id="7" name="deckgen:decor"/>
           <p:cNvSpPr/>
           <p:nvPr/>
         </p:nvSpPr>
@@ -3279,7 +3279,7 @@
       </p:sp>
       <p:sp>
         <p:nvSpPr>
-          <p:cNvPr id="8" name="Oval 7"/>
+          <p:cNvPr id="8" name="deckgen:decor"/>
           <p:cNvSpPr/>
           <p:nvPr/>
         </p:nvSpPr>
@@ -3309,7 +3309,7 @@
       </p:sp>
       <p:sp>
         <p:nvSpPr>
-          <p:cNvPr id="9" name="Oval 8"/>
+          <p:cNvPr id="9" name="deckgen:decor"/>
           <p:cNvSpPr/>
           <p:nvPr/>
         </p:nvSpPr>
@@ -3339,7 +3339,7 @@
       </p:sp>
       <p:sp>
         <p:nvSpPr>
-          <p:cNvPr id="10" name="Rectangle 9"/>
+          <p:cNvPr id="10" name="deckgen:decor"/>
           <p:cNvSpPr/>
           <p:nvPr/>
         </p:nvSpPr>
@@ -3599,7 +3599,7 @@
       <p:grpSpPr/>
       <p:sp>
         <p:nvSpPr>
-          <p:cNvPr id="2" name="Oval 1"/>
+          <p:cNvPr id="2" name="deckgen:decor"/>
           <p:cNvSpPr/>
           <p:nvPr/>
         </p:nvSpPr>
@@ -3629,7 +3629,7 @@
       </p:sp>
       <p:sp>
         <p:nvSpPr>
-          <p:cNvPr id="3" name="Oval 2"/>
+          <p:cNvPr id="3" name="deckgen:decor"/>
           <p:cNvSpPr/>
           <p:nvPr/>
         </p:nvSpPr>
@@ -4406,7 +4406,7 @@
       <p:grpSpPr/>
       <p:sp>
         <p:nvSpPr>
-          <p:cNvPr id="2" name="Oval 1"/>
+          <p:cNvPr id="2" name="deckgen:decor"/>
           <p:cNvSpPr/>
           <p:nvPr/>
         </p:nvSpPr>
@@ -4436,7 +4436,7 @@
       </p:sp>
       <p:sp>
         <p:nvSpPr>
-          <p:cNvPr id="3" name="Oval 2"/>
+          <p:cNvPr id="3" name="deckgen:decor"/>
           <p:cNvSpPr/>
           <p:nvPr/>
         </p:nvSpPr>
@@ -4466,7 +4466,7 @@
       </p:sp>
       <p:sp>
         <p:nvSpPr>
-          <p:cNvPr id="4" name="Oval 3"/>
+          <p:cNvPr id="4" name="deckgen:decor"/>
           <p:cNvSpPr/>
           <p:nvPr/>
         </p:nvSpPr>
@@ -5397,7 +5397,7 @@
       <p:grpSpPr/>
       <p:sp>
         <p:nvSpPr>
-          <p:cNvPr id="2" name="Oval 1"/>
+          <p:cNvPr id="2" name="deckgen:decor"/>
           <p:cNvSpPr/>
           <p:nvPr/>
         </p:nvSpPr>
@@ -5427,7 +5427,7 @@
       </p:sp>
       <p:sp>
         <p:nvSpPr>
-          <p:cNvPr id="3" name="Oval 2"/>
+          <p:cNvPr id="3" name="deckgen:decor"/>
           <p:cNvSpPr/>
           <p:nvPr/>
         </p:nvSpPr>
@@ -5457,7 +5457,7 @@
       </p:sp>
       <p:sp>
         <p:nvSpPr>
-          <p:cNvPr id="4" name="Oval 3"/>
+          <p:cNvPr id="4" name="deckgen:decor"/>
           <p:cNvSpPr/>
           <p:nvPr/>
         </p:nvSpPr>
@@ -5663,7 +5663,7 @@
       </p:sp>
       <p:sp>
         <p:nvSpPr>
-          <p:cNvPr id="10" name="TextBox 9"/>
+          <p:cNvPr id="10" name="deckgen:ornament"/>
           <p:cNvSpPr txBox="1"/>
           <p:nvPr/>
         </p:nvSpPr>
@@ -5848,7 +5848,7 @@
       </p:sp>
       <p:sp>
         <p:nvSpPr>
-          <p:cNvPr id="14" name="TextBox 13"/>
+          <p:cNvPr id="14" name="deckgen:ornament"/>
           <p:cNvSpPr txBox="1"/>
           <p:nvPr/>
         </p:nvSpPr>
@@ -6170,7 +6170,7 @@
       <p:grpSpPr/>
       <p:sp>
         <p:nvSpPr>
-          <p:cNvPr id="2" name="Oval 1"/>
+          <p:cNvPr id="2" name="deckgen:decor"/>
           <p:cNvSpPr/>
           <p:nvPr/>
         </p:nvSpPr>
@@ -6200,7 +6200,7 @@
       </p:sp>
       <p:sp>
         <p:nvSpPr>
-          <p:cNvPr id="3" name="Oval 2"/>
+          <p:cNvPr id="3" name="deckgen:decor"/>
           <p:cNvSpPr/>
           <p:nvPr/>
         </p:nvSpPr>
@@ -6230,7 +6230,7 @@
       </p:sp>
       <p:sp>
         <p:nvSpPr>
-          <p:cNvPr id="4" name="Oval 3"/>
+          <p:cNvPr id="4" name="deckgen:decor"/>
           <p:cNvSpPr/>
           <p:nvPr/>
         </p:nvSpPr>
@@ -6511,7 +6511,7 @@
                 <a:ea typeface="Pretendard"/>
                 <a:cs typeface="Pretendard"/>
               </a:rPr>
-              <a:t>1 Docker 켜짐</a:t>
+              <a:t>1. Docker 켜짐</a:t>
             </a:r>
           </a:p>
         </p:txBody>
@@ -6657,7 +6657,7 @@
                 <a:ea typeface="Pretendard"/>
                 <a:cs typeface="Pretendard"/>
               </a:rPr>
-              <a:t>2 3306 비우기</a:t>
+              <a:t>2. 3306 비우기</a:t>
             </a:r>
           </a:p>
         </p:txBody>
@@ -6803,7 +6803,7 @@
                 <a:ea typeface="Pretendard"/>
                 <a:cs typeface="Pretendard"/>
               </a:rPr>
-              <a:t>3 이미지 받기</a:t>
+              <a:t>3. 이미지 받기</a:t>
             </a:r>
           </a:p>
         </p:txBody>
@@ -6949,7 +6949,7 @@
                 <a:ea typeface="Pretendard"/>
                 <a:cs typeface="Pretendard"/>
               </a:rPr>
-              <a:t>4 바뀐 안내</a:t>
+              <a:t>4. 바뀐 안내</a:t>
             </a:r>
           </a:p>
         </p:txBody>
@@ -7095,7 +7095,7 @@
                 <a:ea typeface="Pretendard"/>
                 <a:cs typeface="Pretendard"/>
               </a:rPr>
-              <a:t>5 환경 재설정</a:t>
+              <a:t>5. 환경 재설정</a:t>
             </a:r>
           </a:p>
         </p:txBody>
@@ -7273,7 +7273,7 @@
       <p:grpSpPr/>
       <p:sp>
         <p:nvSpPr>
-          <p:cNvPr id="2" name="Oval 1"/>
+          <p:cNvPr id="2" name="deckgen:decor"/>
           <p:cNvSpPr/>
           <p:nvPr/>
         </p:nvSpPr>
@@ -7303,7 +7303,7 @@
       </p:sp>
       <p:sp>
         <p:nvSpPr>
-          <p:cNvPr id="3" name="Oval 2"/>
+          <p:cNvPr id="3" name="deckgen:decor"/>
           <p:cNvSpPr/>
           <p:nvPr/>
         </p:nvSpPr>
@@ -7333,7 +7333,7 @@
       </p:sp>
       <p:sp>
         <p:nvSpPr>
-          <p:cNvPr id="4" name="Oval 3"/>
+          <p:cNvPr id="4" name="deckgen:decor"/>
           <p:cNvSpPr/>
           <p:nvPr/>
         </p:nvSpPr>
@@ -8884,7 +8884,7 @@
       <p:grpSpPr/>
       <p:sp>
         <p:nvSpPr>
-          <p:cNvPr id="2" name="Oval 1"/>
+          <p:cNvPr id="2" name="deckgen:decor"/>
           <p:cNvSpPr/>
           <p:nvPr/>
         </p:nvSpPr>
@@ -8914,7 +8914,7 @@
       </p:sp>
       <p:sp>
         <p:nvSpPr>
-          <p:cNvPr id="3" name="Oval 2"/>
+          <p:cNvPr id="3" name="deckgen:decor"/>
           <p:cNvSpPr/>
           <p:nvPr/>
         </p:nvSpPr>
@@ -8944,7 +8944,7 @@
       </p:sp>
       <p:sp>
         <p:nvSpPr>
-          <p:cNvPr id="4" name="Oval 3"/>
+          <p:cNvPr id="4" name="deckgen:decor"/>
           <p:cNvSpPr/>
           <p:nvPr/>
         </p:nvSpPr>
@@ -9911,7 +9911,7 @@
       <p:grpSpPr/>
       <p:sp>
         <p:nvSpPr>
-          <p:cNvPr id="2" name="Oval 1"/>
+          <p:cNvPr id="2" name="deckgen:decor"/>
           <p:cNvSpPr/>
           <p:nvPr/>
         </p:nvSpPr>
@@ -9941,7 +9941,7 @@
       </p:sp>
       <p:sp>
         <p:nvSpPr>
-          <p:cNvPr id="3" name="Oval 2"/>
+          <p:cNvPr id="3" name="deckgen:decor"/>
           <p:cNvSpPr/>
           <p:nvPr/>
         </p:nvSpPr>
@@ -9971,7 +9971,7 @@
       </p:sp>
       <p:sp>
         <p:nvSpPr>
-          <p:cNvPr id="4" name="Oval 3"/>
+          <p:cNvPr id="4" name="deckgen:decor"/>
           <p:cNvSpPr/>
           <p:nvPr/>
         </p:nvSpPr>
@@ -10938,7 +10938,7 @@
       <p:grpSpPr/>
       <p:sp>
         <p:nvSpPr>
-          <p:cNvPr id="2" name="Oval 1"/>
+          <p:cNvPr id="2" name="deckgen:decor"/>
           <p:cNvSpPr/>
           <p:nvPr/>
         </p:nvSpPr>
@@ -10968,7 +10968,7 @@
       </p:sp>
       <p:sp>
         <p:nvSpPr>
-          <p:cNvPr id="3" name="Oval 2"/>
+          <p:cNvPr id="3" name="deckgen:decor"/>
           <p:cNvSpPr/>
           <p:nvPr/>
         </p:nvSpPr>
@@ -10998,7 +10998,7 @@
       </p:sp>
       <p:sp>
         <p:nvSpPr>
-          <p:cNvPr id="4" name="Oval 3"/>
+          <p:cNvPr id="4" name="deckgen:decor"/>
           <p:cNvSpPr/>
           <p:nvPr/>
         </p:nvSpPr>
@@ -11965,7 +11965,7 @@
       <p:grpSpPr/>
       <p:sp>
         <p:nvSpPr>
-          <p:cNvPr id="2" name="Oval 1"/>
+          <p:cNvPr id="2" name="deckgen:decor"/>
           <p:cNvSpPr/>
           <p:nvPr/>
         </p:nvSpPr>
@@ -11995,7 +11995,7 @@
       </p:sp>
       <p:sp>
         <p:nvSpPr>
-          <p:cNvPr id="3" name="Oval 2"/>
+          <p:cNvPr id="3" name="deckgen:decor"/>
           <p:cNvSpPr/>
           <p:nvPr/>
         </p:nvSpPr>
@@ -12025,7 +12025,7 @@
       </p:sp>
       <p:sp>
         <p:nvSpPr>
-          <p:cNvPr id="4" name="Oval 3"/>
+          <p:cNvPr id="4" name="deckgen:decor"/>
           <p:cNvSpPr/>
           <p:nvPr/>
         </p:nvSpPr>

--- a/data-eng/decks/w2d1s0.pptx
+++ b/data-eng/decks/w2d1s0.pptx
@@ -3433,7 +3433,7 @@
                 <a:ea typeface="Pretendard"/>
                 <a:cs typeface="Pretendard"/>
               </a:rPr>
-              <a:t>2-1 · MySQL 8.0 설치 및 기초 쿼리 · 수업 전 10분</a:t>
+              <a:t>2-1 · MySQL 9.7 설치 및 기초 쿼리 · 수업 전 10분</a:t>
             </a:r>
           </a:p>
         </p:txBody>
@@ -3764,7 +3764,7 @@
                 <a:ea typeface="Pretendard"/>
                 <a:cs typeface="Pretendard"/>
               </a:rPr>
-              <a:t>다음은 관계형 데이터베이스와 MySQL 8.0 개요 (1H)</a:t>
+              <a:t>다음은 관계형 데이터베이스와 MySQL 9.7 개요 (1H)</a:t>
             </a:r>
           </a:p>
         </p:txBody>
@@ -5039,7 +5039,7 @@
                 <a:ea typeface="Pretendard"/>
                 <a:cs typeface="Pretendard"/>
               </a:rPr>
-              <a:t>mysql:8.0 이미지가 약 1.1GB — 실습 중에 받으면 그동안 손을 놓는다</a:t>
+              <a:t>mysql:9.7 이미지가 약 1.3GB — 실습 중에 받으면 그동안 손을 놓는다</a:t>
             </a:r>
           </a:p>
         </p:txBody>
@@ -6844,7 +6844,7 @@
                 <a:ea typeface="Pretendard"/>
                 <a:cs typeface="Pretendard"/>
               </a:rPr>
-              <a:t>docker pull mysql:8.0</a:t>
+              <a:t>docker pull mysql:9.7</a:t>
             </a:r>
           </a:p>
         </p:txBody>
@@ -10252,7 +10252,7 @@
                 <a:ea typeface="Pretendard"/>
                 <a:cs typeface="Pretendard"/>
               </a:rPr>
-              <a:t>docker pull mysql:8.0</a:t>
+              <a:t>docker pull mysql:9.7</a:t>
             </a:r>
           </a:p>
         </p:txBody>
@@ -10293,7 +10293,7 @@
                 <a:ea typeface="Pretendard"/>
                 <a:cs typeface="Pretendard"/>
               </a:rPr>
-              <a:t>약 1.1GB — 이론 시간이 시작될 때 걸어 두면 실습 전에 끝난다</a:t>
+              <a:t>약 1.3GB — 이론 시간이 시작될 때 걸어 두면 실습 전에 끝난다</a:t>
             </a:r>
           </a:p>
         </p:txBody>
@@ -10439,7 +10439,7 @@
                 <a:ea typeface="Pretendard"/>
                 <a:cs typeface="Pretendard"/>
               </a:rPr>
-              <a:t>docker images mysql:8.0</a:t>
+              <a:t>docker images mysql:9.7</a:t>
             </a:r>
           </a:p>
         </p:txBody>
@@ -10480,7 +10480,7 @@
                 <a:ea typeface="Pretendard"/>
                 <a:cs typeface="Pretendard"/>
               </a:rPr>
-              <a:t>8.0 한 줄이 보이면 끝 — 이미 받았다면 Image is up to date</a:t>
+              <a:t>9.7 한 줄이 보이면 끝 — 이미 받았다면 Image is up to date</a:t>
             </a:r>
           </a:p>
         </p:txBody>
@@ -12598,7 +12598,7 @@
                 <a:ea typeface="Pretendard"/>
                 <a:cs typeface="Pretendard"/>
               </a:rPr>
-              <a:t>docker images 에 mysql 8.0 한 줄</a:t>
+              <a:t>docker images 에 mysql 9.7 한 줄</a:t>
             </a:r>
           </a:p>
         </p:txBody>
